--- a/Materjalid/Day7 SQL/Sales data/7-paev-andmetarkus-esitlus.pptx
+++ b/Materjalid/Day7 SQL/Sales data/7-paev-andmetarkus-esitlus.pptx
@@ -28883,6 +28883,21 @@
 </file>
 
 <file path=customXml/item1.xml><?xml version="1.0" encoding="utf-8"?>
+<p:properties xmlns:p="http://schemas.microsoft.com/office/2006/metadata/properties" xmlns:xsi="http://www.w3.org/2001/XMLSchema-instance" xmlns:pc="http://schemas.microsoft.com/office/infopath/2007/PartnerControls">
+  <documentManagement/>
+</p:properties>
+</file>
+
+<file path=customXml/item2.xml><?xml version="1.0" encoding="utf-8"?>
+<?mso-contentType ?>
+<FormTemplates xmlns="http://schemas.microsoft.com/sharepoint/v3/contenttype/forms">
+  <Display>DocumentLibraryForm</Display>
+  <Edit>DocumentLibraryForm</Edit>
+  <New>DocumentLibraryForm</New>
+</FormTemplates>
+</file>
+
+<file path=customXml/item3.xml><?xml version="1.0" encoding="utf-8"?>
 <ct:contentTypeSchema xmlns:ct="http://schemas.microsoft.com/office/2006/metadata/contentType" xmlns:ma="http://schemas.microsoft.com/office/2006/metadata/properties/metaAttributes" ct:_="" ma:_="" ma:contentTypeName="Document" ma:contentTypeID="0x010100C4D27B8FA8976546BCD79313C588588D" ma:contentTypeVersion="8" ma:contentTypeDescription="Create a new document." ma:contentTypeScope="" ma:versionID="a112c56f6fe148a79025c76584832af0">
   <xsd:schema xmlns:xsd="http://www.w3.org/2001/XMLSchema" xmlns:xs="http://www.w3.org/2001/XMLSchema" xmlns:p="http://schemas.microsoft.com/office/2006/metadata/properties" xmlns:ns2="a1a2d923-8fea-42f1-bd41-9cdfff65694e" targetNamespace="http://schemas.microsoft.com/office/2006/metadata/properties" ma:root="true" ma:fieldsID="97c8655d467eaa9470a714421e7268c0" ns2:_="">
     <xsd:import namespace="a1a2d923-8fea-42f1-bd41-9cdfff65694e"/>
@@ -29050,22 +29065,24 @@
 </ct:contentTypeSchema>
 </file>
 
-<file path=customXml/item2.xml><?xml version="1.0" encoding="utf-8"?>
-<?mso-contentType ?>
-<FormTemplates xmlns="http://schemas.microsoft.com/sharepoint/v3/contenttype/forms">
-  <Display>DocumentLibraryForm</Display>
-  <Edit>DocumentLibraryForm</Edit>
-  <New>DocumentLibraryForm</New>
-</FormTemplates>
+<file path=customXml/itemProps1.xml><?xml version="1.0" encoding="utf-8"?>
+<ds:datastoreItem xmlns:ds="http://schemas.openxmlformats.org/officeDocument/2006/customXml" ds:itemID="{5BDF4908-A52A-47DD-A794-6E02D71942FC}">
+  <ds:schemaRefs>
+    <ds:schemaRef ds:uri="http://schemas.microsoft.com/office/2006/metadata/properties"/>
+    <ds:schemaRef ds:uri="http://schemas.microsoft.com/office/infopath/2007/PartnerControls"/>
+  </ds:schemaRefs>
+</ds:datastoreItem>
 </file>
 
-<file path=customXml/item3.xml><?xml version="1.0" encoding="utf-8"?>
-<p:properties xmlns:p="http://schemas.microsoft.com/office/2006/metadata/properties" xmlns:xsi="http://www.w3.org/2001/XMLSchema-instance" xmlns:pc="http://schemas.microsoft.com/office/infopath/2007/PartnerControls">
-  <documentManagement/>
-</p:properties>
+<file path=customXml/itemProps2.xml><?xml version="1.0" encoding="utf-8"?>
+<ds:datastoreItem xmlns:ds="http://schemas.openxmlformats.org/officeDocument/2006/customXml" ds:itemID="{9DC439CA-6F1C-4005-ACA6-A52E04DEE0A7}">
+  <ds:schemaRefs>
+    <ds:schemaRef ds:uri="http://schemas.microsoft.com/sharepoint/v3/contenttype/forms"/>
+  </ds:schemaRefs>
+</ds:datastoreItem>
 </file>
 
-<file path=customXml/itemProps1.xml><?xml version="1.0" encoding="utf-8"?>
+<file path=customXml/itemProps3.xml><?xml version="1.0" encoding="utf-8"?>
 <ds:datastoreItem xmlns:ds="http://schemas.openxmlformats.org/officeDocument/2006/customXml" ds:itemID="{9CF4F972-2392-44D0-AA45-41AC4FDC4A59}">
   <ds:schemaRefs>
     <ds:schemaRef ds:uri="a1a2d923-8fea-42f1-bd41-9cdfff65694e"/>
@@ -29081,21 +29098,4 @@
     <ds:schemaRef ds:uri="http://www.w3.org/2001/XMLSchema"/>
   </ds:schemaRefs>
 </ds:datastoreItem>
-</file>
-
-<file path=customXml/itemProps2.xml><?xml version="1.0" encoding="utf-8"?>
-<ds:datastoreItem xmlns:ds="http://schemas.openxmlformats.org/officeDocument/2006/customXml" ds:itemID="{9DC439CA-6F1C-4005-ACA6-A52E04DEE0A7}">
-  <ds:schemaRefs>
-    <ds:schemaRef ds:uri="http://schemas.microsoft.com/sharepoint/v3/contenttype/forms"/>
-  </ds:schemaRefs>
-</ds:datastoreItem>
-</file>
-
-<file path=customXml/itemProps3.xml><?xml version="1.0" encoding="utf-8"?>
-<ds:datastoreItem xmlns:ds="http://schemas.openxmlformats.org/officeDocument/2006/customXml" ds:itemID="{5BDF4908-A52A-47DD-A794-6E02D71942FC}">
-  <ds:schemaRefs>
-    <ds:schemaRef ds:uri="http://schemas.microsoft.com/office/2006/metadata/properties"/>
-    <ds:schemaRef ds:uri="http://schemas.microsoft.com/office/infopath/2007/PartnerControls"/>
-  </ds:schemaRefs>
-</ds:datastoreItem>
 </file>